--- a/Planning docs/Slides/lesson-1-4-teacher-slides.pptx
+++ b/Planning docs/Slides/lesson-1-4-teacher-slides.pptx
@@ -4477,7 +4477,7 @@
                 <a:ea typeface="Calibri" pitchFamily="34" charset="-122"/>
                 <a:cs typeface="Calibri" pitchFamily="34" charset="-120"/>
               </a:rPr>
-              <a:t>•  Stanley is flat but seems okay. What would YOU try if you were flat? What would worry you?</a:t>
+              <a:t>•  Stop at the last line of the chapter. Good readers ask questions while they read, not just before. Which of your questions did Chapter 1 answer, and which one is still open?</a:t>
             </a:r>
             <a:endParaRPr lang="en-US" sz="1500" dirty="0"/>
           </a:p>
@@ -5953,7 +5953,7 @@
                 <a:ea typeface="Calibri" pitchFamily="34" charset="-122"/>
                 <a:cs typeface="Calibri" pitchFamily="34" charset="-120"/>
               </a:rPr>
-              <a:t>Stanley is flat but seems okay. What would YOU try if you were flat? What would worry you?</a:t>
+              <a:t>Stop at the last line of the chapter. Good readers ask questions while they read, not just before. Which of your questions did Chapter 1 answer, and which one is still open?</a:t>
             </a:r>
             <a:endParaRPr lang="en-US" sz="1700" dirty="0"/>
           </a:p>
